--- a/docs/reports/台灣產業趨勢監測週報_2026-10-12_2026-10-19.pptx
+++ b/docs/reports/台灣產業趨勢監測週報_2026-10-12_2026-10-19.pptx
@@ -183,37 +183,37 @@
                 <c:formatCode>General</c:formatCode>
                 <c:ptCount val="11"/>
                 <c:pt idx="0">
-                  <c:v>105</c:v>
+                  <c:v>113</c:v>
                 </c:pt>
                 <c:pt idx="1">
-                  <c:v>160</c:v>
+                  <c:v>170</c:v>
                 </c:pt>
                 <c:pt idx="2">
-                  <c:v>213</c:v>
+                  <c:v>223</c:v>
                 </c:pt>
                 <c:pt idx="3">
-                  <c:v>231</c:v>
+                  <c:v>242</c:v>
                 </c:pt>
                 <c:pt idx="4">
-                  <c:v>241</c:v>
+                  <c:v>244</c:v>
                 </c:pt>
                 <c:pt idx="5">
-                  <c:v>282</c:v>
+                  <c:v>293</c:v>
                 </c:pt>
                 <c:pt idx="6">
-                  <c:v>315</c:v>
+                  <c:v>331</c:v>
                 </c:pt>
                 <c:pt idx="7">
-                  <c:v>351</c:v>
+                  <c:v>374</c:v>
                 </c:pt>
                 <c:pt idx="8">
-                  <c:v>812</c:v>
+                  <c:v>854</c:v>
                 </c:pt>
                 <c:pt idx="9">
-                  <c:v>973</c:v>
+                  <c:v>1010</c:v>
                 </c:pt>
                 <c:pt idx="10">
-                  <c:v>1064</c:v>
+                  <c:v>1093</c:v>
                 </c:pt>
               </c:numCache>
             </c:numRef>
@@ -329,10 +329,10 @@
                 <c:formatCode>General</c:formatCode>
                 <c:ptCount val="7"/>
                 <c:pt idx="0">
-                  <c:v>12</c:v>
+                  <c:v>15</c:v>
                 </c:pt>
                 <c:pt idx="1">
-                  <c:v>10</c:v>
+                  <c:v>11</c:v>
                 </c:pt>
                 <c:pt idx="2">
                   <c:v>10</c:v>
@@ -523,10 +523,10 @@
                   <c:v>聯發科</c:v>
                 </c:pt>
                 <c:pt idx="4">
+                  <c:v>超微</c:v>
+                </c:pt>
+                <c:pt idx="5">
                   <c:v>英特爾</c:v>
-                </c:pt>
-                <c:pt idx="5">
-                  <c:v>超微</c:v>
                 </c:pt>
               </c:strCache>
             </c:strRef>
@@ -538,22 +538,22 @@
                 <c:formatCode>General</c:formatCode>
                 <c:ptCount val="6"/>
                 <c:pt idx="0">
-                  <c:v>289</c:v>
+                  <c:v>300</c:v>
                 </c:pt>
                 <c:pt idx="1">
-                  <c:v>153</c:v>
+                  <c:v>155</c:v>
                 </c:pt>
                 <c:pt idx="2">
-                  <c:v>48</c:v>
+                  <c:v>49</c:v>
                 </c:pt>
                 <c:pt idx="3">
-                  <c:v>37</c:v>
+                  <c:v>38</c:v>
                 </c:pt>
                 <c:pt idx="4">
+                  <c:v>27</c:v>
+                </c:pt>
+                <c:pt idx="5">
                   <c:v>26</c:v>
-                </c:pt>
-                <c:pt idx="5">
-                  <c:v>25</c:v>
                 </c:pt>
               </c:numCache>
             </c:numRef>
@@ -591,10 +591,10 @@
                   <c:v>聯發科</c:v>
                 </c:pt>
                 <c:pt idx="4">
+                  <c:v>超微</c:v>
+                </c:pt>
+                <c:pt idx="5">
                   <c:v>英特爾</c:v>
-                </c:pt>
-                <c:pt idx="5">
-                  <c:v>超微</c:v>
                 </c:pt>
               </c:strCache>
             </c:strRef>
@@ -618,10 +618,10 @@
                   <c:v>47</c:v>
                 </c:pt>
                 <c:pt idx="4">
+                  <c:v>44</c:v>
+                </c:pt>
+                <c:pt idx="5">
                   <c:v>27</c:v>
-                </c:pt>
-                <c:pt idx="5">
-                  <c:v>44</c:v>
                 </c:pt>
               </c:numCache>
             </c:numRef>
@@ -3705,7 +3705,7 @@
           </a:p>
           <a:p>
             <a:r>
-              <a:t>產出:2026-10-19 13:38(台北時間)</a:t>
+              <a:t>產出:2026-10-19 17:56(台北時間)</a:t>
             </a:r>
           </a:p>
           <a:p>
@@ -3773,7 +3773,7 @@
               <a:defRPr sz="1600"/>
             </a:pPr>
             <a:r>
-              <a:t>本期共蒐集 9152 篇公開報導,可歸類 4747 篇</a:t>
+              <a:t>本期共蒐集 9517 篇公開報導,可歸類 4947 篇</a:t>
             </a:r>
           </a:p>
           <a:p>
@@ -3781,7 +3781,7 @@
               <a:defRPr sz="1600"/>
             </a:pPr>
             <a:r>
-              <a:t>高科技製造業:1064 篇(佔可歸類 22.4%)</a:t>
+              <a:t>高科技製造業:1093 篇(佔可歸類 22.1%)</a:t>
             </a:r>
           </a:p>
           <a:p>
@@ -3789,7 +3789,7 @@
               <a:defRPr sz="1600"/>
             </a:pPr>
             <a:r>
-              <a:t>政府教育單位:973 篇(佔可歸類 20.5%)</a:t>
+              <a:t>政府教育單位:1010 篇(佔可歸類 20.4%)</a:t>
             </a:r>
           </a:p>
           <a:p>
@@ -3797,7 +3797,7 @@
               <a:defRPr sz="1600"/>
             </a:pPr>
             <a:r>
-              <a:t>金融業:812 篇(佔可歸類 17.1%)</a:t>
+              <a:t>金融業:854 篇(佔可歸類 17.3%)</a:t>
             </a:r>
           </a:p>
           <a:p>
@@ -3805,7 +3805,7 @@
               <a:defRPr sz="1600"/>
             </a:pPr>
             <a:r>
-              <a:t>最熱主題:AI 與自動化(1084 篇)、利率與資金環境(379 篇)、地緣政治與供應鏈(274 篇)</a:t>
+              <a:t>最熱主題:AI 與自動化(1126 篇)、利率與資金環境(390 篇)、地緣政治與供應鏈(281 篇)</a:t>
             </a:r>
           </a:p>
           <a:p>
@@ -3909,7 +3909,7 @@
           <a:lstStyle/>
           <a:p>
             <a:r>
-              <a:t>競品聲量對比(SOV)— 電腦品牌(合計 57 篇)</a:t>
+              <a:t>競品聲量對比(SOV)— 電腦品牌(合計 61 篇)</a:t>
             </a:r>
           </a:p>
         </p:txBody>
@@ -3966,7 +3966,7 @@
           <a:lstStyle/>
           <a:p>
             <a:r>
-              <a:t>競品聲量對比(SOV)— 半導體(合計 578 篇)</a:t>
+              <a:t>競品聲量對比(SOV)— 半導體(合計 595 篇)</a:t>
             </a:r>
           </a:p>
         </p:txBody>

--- a/docs/reports/台灣產業趨勢監測週報_2026-10-12_2026-10-19.pptx
+++ b/docs/reports/台灣產業趨勢監測週報_2026-10-12_2026-10-19.pptx
@@ -150,10 +150,10 @@
                   <c:v>專業科學及技術服務業</c:v>
                 </c:pt>
                 <c:pt idx="3">
+                  <c:v>傳統製造業</c:v>
+                </c:pt>
+                <c:pt idx="4">
                   <c:v>服務業</c:v>
-                </c:pt>
-                <c:pt idx="4">
-                  <c:v>傳統製造業</c:v>
                 </c:pt>
                 <c:pt idx="5">
                   <c:v>住宿及餐飲業</c:v>
@@ -183,37 +183,37 @@
                 <c:formatCode>General</c:formatCode>
                 <c:ptCount val="11"/>
                 <c:pt idx="0">
-                  <c:v>113</c:v>
+                  <c:v>114</c:v>
                 </c:pt>
                 <c:pt idx="1">
-                  <c:v>170</c:v>
+                  <c:v>173</c:v>
                 </c:pt>
                 <c:pt idx="2">
-                  <c:v>223</c:v>
+                  <c:v>227</c:v>
                 </c:pt>
                 <c:pt idx="3">
-                  <c:v>242</c:v>
+                  <c:v>245</c:v>
                 </c:pt>
                 <c:pt idx="4">
-                  <c:v>244</c:v>
+                  <c:v>245</c:v>
                 </c:pt>
                 <c:pt idx="5">
-                  <c:v>293</c:v>
+                  <c:v>296</c:v>
                 </c:pt>
                 <c:pt idx="6">
-                  <c:v>331</c:v>
+                  <c:v>344</c:v>
                 </c:pt>
                 <c:pt idx="7">
-                  <c:v>374</c:v>
+                  <c:v>386</c:v>
                 </c:pt>
                 <c:pt idx="8">
-                  <c:v>854</c:v>
+                  <c:v>876</c:v>
                 </c:pt>
                 <c:pt idx="9">
-                  <c:v>1010</c:v>
+                  <c:v>1031</c:v>
                 </c:pt>
                 <c:pt idx="10">
-                  <c:v>1093</c:v>
+                  <c:v>1118</c:v>
                 </c:pt>
               </c:numCache>
             </c:numRef>
@@ -305,10 +305,10 @@
                   <c:v>宏碁</c:v>
                 </c:pt>
                 <c:pt idx="2">
+                  <c:v>微星</c:v>
+                </c:pt>
+                <c:pt idx="3">
                   <c:v>技嘉</c:v>
-                </c:pt>
-                <c:pt idx="3">
-                  <c:v>微星</c:v>
                 </c:pt>
                 <c:pt idx="4">
                   <c:v>聯想</c:v>
@@ -329,7 +329,7 @@
                 <c:formatCode>General</c:formatCode>
                 <c:ptCount val="7"/>
                 <c:pt idx="0">
-                  <c:v>15</c:v>
+                  <c:v>17</c:v>
                 </c:pt>
                 <c:pt idx="1">
                   <c:v>11</c:v>
@@ -338,7 +338,7 @@
                   <c:v>10</c:v>
                 </c:pt>
                 <c:pt idx="3">
-                  <c:v>9</c:v>
+                  <c:v>10</c:v>
                 </c:pt>
                 <c:pt idx="4">
                   <c:v>9</c:v>
@@ -379,10 +379,10 @@
                   <c:v>宏碁</c:v>
                 </c:pt>
                 <c:pt idx="2">
+                  <c:v>微星</c:v>
+                </c:pt>
+                <c:pt idx="3">
                   <c:v>技嘉</c:v>
-                </c:pt>
-                <c:pt idx="3">
-                  <c:v>微星</c:v>
                 </c:pt>
                 <c:pt idx="4">
                   <c:v>聯想</c:v>
@@ -409,10 +409,10 @@
                   <c:v>22</c:v>
                 </c:pt>
                 <c:pt idx="2">
+                  <c:v>11</c:v>
+                </c:pt>
+                <c:pt idx="3">
                   <c:v>13</c:v>
-                </c:pt>
-                <c:pt idx="3">
-                  <c:v>11</c:v>
                 </c:pt>
                 <c:pt idx="4">
                   <c:v>11</c:v>
@@ -523,10 +523,10 @@
                   <c:v>聯發科</c:v>
                 </c:pt>
                 <c:pt idx="4">
+                  <c:v>英特爾</c:v>
+                </c:pt>
+                <c:pt idx="5">
                   <c:v>超微</c:v>
-                </c:pt>
-                <c:pt idx="5">
-                  <c:v>英特爾</c:v>
                 </c:pt>
               </c:strCache>
             </c:strRef>
@@ -538,22 +538,22 @@
                 <c:formatCode>General</c:formatCode>
                 <c:ptCount val="6"/>
                 <c:pt idx="0">
-                  <c:v>300</c:v>
+                  <c:v>304</c:v>
                 </c:pt>
                 <c:pt idx="1">
-                  <c:v>155</c:v>
+                  <c:v>158</c:v>
                 </c:pt>
                 <c:pt idx="2">
-                  <c:v>49</c:v>
+                  <c:v>50</c:v>
                 </c:pt>
                 <c:pt idx="3">
-                  <c:v>38</c:v>
+                  <c:v>39</c:v>
                 </c:pt>
                 <c:pt idx="4">
-                  <c:v>27</c:v>
+                  <c:v>28</c:v>
                 </c:pt>
                 <c:pt idx="5">
-                  <c:v>26</c:v>
+                  <c:v>28</c:v>
                 </c:pt>
               </c:numCache>
             </c:numRef>
@@ -591,10 +591,10 @@
                   <c:v>聯發科</c:v>
                 </c:pt>
                 <c:pt idx="4">
+                  <c:v>英特爾</c:v>
+                </c:pt>
+                <c:pt idx="5">
                   <c:v>超微</c:v>
-                </c:pt>
-                <c:pt idx="5">
-                  <c:v>英特爾</c:v>
                 </c:pt>
               </c:strCache>
             </c:strRef>
@@ -618,10 +618,10 @@
                   <c:v>47</c:v>
                 </c:pt>
                 <c:pt idx="4">
+                  <c:v>27</c:v>
+                </c:pt>
+                <c:pt idx="5">
                   <c:v>44</c:v>
-                </c:pt>
-                <c:pt idx="5">
-                  <c:v>27</c:v>
                 </c:pt>
               </c:numCache>
             </c:numRef>
@@ -3705,7 +3705,7 @@
           </a:p>
           <a:p>
             <a:r>
-              <a:t>產出:2026-10-19 17:56(台北時間)</a:t>
+              <a:t>產出:2026-10-19 19:11(台北時間)</a:t>
             </a:r>
           </a:p>
           <a:p>
@@ -3773,7 +3773,7 @@
               <a:defRPr sz="1600"/>
             </a:pPr>
             <a:r>
-              <a:t>本期共蒐集 9517 篇公開報導,可歸類 4947 篇</a:t>
+              <a:t>本期共蒐集 9729 篇公開報導,可歸類 5055 篇</a:t>
             </a:r>
           </a:p>
           <a:p>
@@ -3781,7 +3781,7 @@
               <a:defRPr sz="1600"/>
             </a:pPr>
             <a:r>
-              <a:t>高科技製造業:1093 篇(佔可歸類 22.1%)</a:t>
+              <a:t>高科技製造業:1118 篇(佔可歸類 22.1%)</a:t>
             </a:r>
           </a:p>
           <a:p>
@@ -3789,7 +3789,7 @@
               <a:defRPr sz="1600"/>
             </a:pPr>
             <a:r>
-              <a:t>政府教育單位:1010 篇(佔可歸類 20.4%)</a:t>
+              <a:t>政府教育單位:1031 篇(佔可歸類 20.4%)</a:t>
             </a:r>
           </a:p>
           <a:p>
@@ -3797,7 +3797,7 @@
               <a:defRPr sz="1600"/>
             </a:pPr>
             <a:r>
-              <a:t>金融業:854 篇(佔可歸類 17.3%)</a:t>
+              <a:t>金融業:876 篇(佔可歸類 17.3%)</a:t>
             </a:r>
           </a:p>
           <a:p>
@@ -3805,7 +3805,7 @@
               <a:defRPr sz="1600"/>
             </a:pPr>
             <a:r>
-              <a:t>最熱主題:AI 與自動化(1126 篇)、利率與資金環境(390 篇)、地緣政治與供應鏈(281 篇)</a:t>
+              <a:t>最熱主題:AI 與自動化(1152 篇)、利率與資金環境(398 篇)、地緣政治與供應鏈(284 篇)</a:t>
             </a:r>
           </a:p>
           <a:p>
@@ -3909,7 +3909,7 @@
           <a:lstStyle/>
           <a:p>
             <a:r>
-              <a:t>競品聲量對比(SOV)— 電腦品牌(合計 61 篇)</a:t>
+              <a:t>競品聲量對比(SOV)— 電腦品牌(合計 64 篇)</a:t>
             </a:r>
           </a:p>
         </p:txBody>
@@ -3966,7 +3966,7 @@
           <a:lstStyle/>
           <a:p>
             <a:r>
-              <a:t>競品聲量對比(SOV)— 半導體(合計 595 篇)</a:t>
+              <a:t>競品聲量對比(SOV)— 半導體(合計 607 篇)</a:t>
             </a:r>
           </a:p>
         </p:txBody>
@@ -4047,7 +4047,7 @@
               <a:defRPr sz="1600"/>
             </a:pPr>
             <a:r>
-              <a:t>中華電信:疑似負面 12 篇(命中:工安、罷工、詐騙、跳票)</a:t>
+              <a:t>中華電信:疑似負面 13 篇(命中:工安、罷工、詐騙、跳票)</a:t>
             </a:r>
           </a:p>
           <a:p>
